--- a/symposium/19th/img/cover.pptx
+++ b/symposium/19th/img/cover.pptx
@@ -3062,6 +3062,39 @@
           <a:p>
             <a:pPr algn="ctr"/>
             <a:r>
+              <a:rPr lang="en-US" altLang="ko-KR" sz="2400" b="1">
+                <a:solidFill>
+                  <a:schemeClr val="bg1"/>
+                </a:solidFill>
+                <a:latin typeface="나눔스퀘어 Bold" panose="020B0600000101010101" pitchFamily="50" charset="-127"/>
+                <a:ea typeface="나눔스퀘어 Bold" panose="020B0600000101010101" pitchFamily="50" charset="-127"/>
+                <a:cs typeface="Times New Roman" panose="02020603050405020304" pitchFamily="18" charset="0"/>
+              </a:rPr>
+              <a:t>2026 19</a:t>
+            </a:r>
+            <a:r>
+              <a:rPr lang="en-US" altLang="ko-KR" sz="2400" b="1" baseline="30000">
+                <a:solidFill>
+                  <a:schemeClr val="bg1"/>
+                </a:solidFill>
+                <a:latin typeface="나눔스퀘어 Bold" panose="020B0600000101010101" pitchFamily="50" charset="-127"/>
+                <a:ea typeface="나눔스퀘어 Bold" panose="020B0600000101010101" pitchFamily="50" charset="-127"/>
+                <a:cs typeface="Times New Roman" panose="02020603050405020304" pitchFamily="18" charset="0"/>
+              </a:rPr>
+              <a:t>th</a:t>
+            </a:r>
+            <a:r>
+              <a:rPr lang="en-US" altLang="ko-KR" sz="2400" b="1">
+                <a:solidFill>
+                  <a:schemeClr val="bg1"/>
+                </a:solidFill>
+                <a:latin typeface="나눔스퀘어 Bold" panose="020B0600000101010101" pitchFamily="50" charset="-127"/>
+                <a:ea typeface="나눔스퀘어 Bold" panose="020B0600000101010101" pitchFamily="50" charset="-127"/>
+                <a:cs typeface="Times New Roman" panose="02020603050405020304" pitchFamily="18" charset="0"/>
+              </a:rPr>
+              <a:t> </a:t>
+            </a:r>
+            <a:r>
               <a:rPr lang="en-US" altLang="ko-KR" sz="2400" b="1" dirty="0">
                 <a:solidFill>
                   <a:schemeClr val="bg1"/>
@@ -3070,29 +3103,7 @@
                 <a:ea typeface="나눔스퀘어 Bold" panose="020B0600000101010101" pitchFamily="50" charset="-127"/>
                 <a:cs typeface="Times New Roman" panose="02020603050405020304" pitchFamily="18" charset="0"/>
               </a:rPr>
-              <a:t>2026 18</a:t>
-            </a:r>
-            <a:r>
-              <a:rPr lang="en-US" altLang="ko-KR" sz="2400" b="1" baseline="30000" dirty="0">
-                <a:solidFill>
-                  <a:schemeClr val="bg1"/>
-                </a:solidFill>
-                <a:latin typeface="나눔스퀘어 Bold" panose="020B0600000101010101" pitchFamily="50" charset="-127"/>
-                <a:ea typeface="나눔스퀘어 Bold" panose="020B0600000101010101" pitchFamily="50" charset="-127"/>
-                <a:cs typeface="Times New Roman" panose="02020603050405020304" pitchFamily="18" charset="0"/>
-              </a:rPr>
-              <a:t>th</a:t>
-            </a:r>
-            <a:r>
-              <a:rPr lang="en-US" altLang="ko-KR" sz="2400" b="1" dirty="0">
-                <a:solidFill>
-                  <a:schemeClr val="bg1"/>
-                </a:solidFill>
-                <a:latin typeface="나눔스퀘어 Bold" panose="020B0600000101010101" pitchFamily="50" charset="-127"/>
-                <a:ea typeface="나눔스퀘어 Bold" panose="020B0600000101010101" pitchFamily="50" charset="-127"/>
-                <a:cs typeface="Times New Roman" panose="02020603050405020304" pitchFamily="18" charset="0"/>
-              </a:rPr>
-              <a:t> Symposium on AI-Embedded System-on-Chip</a:t>
+              <a:t>Symposium on AI-Embedded System-on-Chip</a:t>
             </a:r>
           </a:p>
           <a:p>
@@ -3105,27 +3116,7 @@
                 <a:latin typeface="Titillium Web" panose="00000500000000000000" pitchFamily="2" charset="0"/>
                 <a:cs typeface="Times New Roman" panose="02020603050405020304" pitchFamily="18" charset="0"/>
               </a:rPr>
-              <a:t>Kyungpook National University, Daehak-ro 80, No. 724, Daegu, Korea</a:t>
-            </a:r>
-            <a:r>
-              <a:rPr lang="en-US" altLang="ko-KR" sz="1400" b="1">
-                <a:solidFill>
-                  <a:schemeClr val="bg1"/>
-                </a:solidFill>
-                <a:latin typeface="Titillium Web" panose="00000500000000000000" pitchFamily="2" charset="0"/>
-                <a:cs typeface="Times New Roman" panose="02020603050405020304" pitchFamily="18" charset="0"/>
-              </a:rPr>
-              <a:t>, May 28, </a:t>
-            </a:r>
-            <a:r>
-              <a:rPr lang="en-US" altLang="ko-KR" sz="1400" b="1" dirty="0">
-                <a:solidFill>
-                  <a:schemeClr val="bg1"/>
-                </a:solidFill>
-                <a:latin typeface="Titillium Web" panose="00000500000000000000" pitchFamily="2" charset="0"/>
-                <a:cs typeface="Times New Roman" panose="02020603050405020304" pitchFamily="18" charset="0"/>
-              </a:rPr>
-              <a:t>2026</a:t>
+              <a:t>Kyungpook National University, Daehak-ro 80, No. 724, Daegu, Korea, July 23, 2026</a:t>
             </a:r>
           </a:p>
           <a:p>
